--- a/RiVaR-College.pptx
+++ b/RiVaR-College.pptx
@@ -28,15 +28,16 @@
     <p:sldId id="273" r:id="rId24"/>
     <p:sldId id="274" r:id="rId25"/>
     <p:sldId id="275" r:id="rId26"/>
+    <p:sldId id="276" r:id="rId27"/>
   </p:sldIdLst>
   <p:sldSz cy="5143500" cx="9144000"/>
   <p:notesSz cx="6858000" cy="9144000"/>
   <p:embeddedFontLst>
     <p:embeddedFont>
       <p:font typeface="Old Standard TT"/>
-      <p:regular r:id="rId27"/>
-      <p:bold r:id="rId28"/>
-      <p:italic r:id="rId29"/>
+      <p:regular r:id="rId28"/>
+      <p:bold r:id="rId29"/>
+      <p:italic r:id="rId30"/>
     </p:embeddedFont>
   </p:embeddedFontLst>
   <p:defaultTextStyle>
@@ -1956,6 +1957,105 @@
       <p:sp>
         <p:nvSpPr>
           <p:cNvPr id="179" name="Google Shape;179;gc6f90357f_0_47:notes"/>
+          <p:cNvSpPr txBox="1"/>
+          <p:nvPr>
+            <p:ph idx="1" type="body"/>
+          </p:nvPr>
+        </p:nvSpPr>
+        <p:spPr>
+          <a:xfrm>
+            <a:off x="685800" y="4343400"/>
+            <a:ext cx="5486400" cy="4114800"/>
+          </a:xfrm>
+          <a:prstGeom prst="rect">
+            <a:avLst/>
+          </a:prstGeom>
+        </p:spPr>
+        <p:txBody>
+          <a:bodyPr anchorCtr="0" anchor="t" bIns="91425" lIns="91425" spcFirstLastPara="1" rIns="91425" wrap="square" tIns="91425">
+            <a:noAutofit/>
+          </a:bodyPr>
+          <a:lstStyle/>
+          <a:p>
+            <a:pPr indent="0" lvl="0" marL="0" rtl="0" algn="l">
+              <a:spcBef>
+                <a:spcPts val="0"/>
+              </a:spcBef>
+              <a:spcAft>
+                <a:spcPts val="0"/>
+              </a:spcAft>
+              <a:buNone/>
+            </a:pPr>
+            <a:r>
+              <a:t/>
+            </a:r>
+            <a:endParaRPr/>
+          </a:p>
+        </p:txBody>
+      </p:sp>
+    </p:spTree>
+  </p:cSld>
+  <p:clrMapOvr>
+    <a:masterClrMapping/>
+  </p:clrMapOvr>
+</p:notes>
+</file>
+
+<file path=ppt/notesSlides/notesSlide21.xml><?xml version="1.0" encoding="utf-8"?>
+<p:notes xmlns:a="http://schemas.openxmlformats.org/drawingml/2006/main" xmlns:r="http://schemas.openxmlformats.org/officeDocument/2006/relationships" xmlns:mc="http://schemas.openxmlformats.org/markup-compatibility/2006" xmlns:mv="urn:schemas-microsoft-com:mac:vml" xmlns:p="http://schemas.openxmlformats.org/presentationml/2006/main" xmlns:c="http://schemas.openxmlformats.org/drawingml/2006/chart" xmlns:dgm="http://schemas.openxmlformats.org/drawingml/2006/diagram" xmlns:o="urn:schemas-microsoft-com:office:office" xmlns:v="urn:schemas-microsoft-com:vml" xmlns:pvml="urn:schemas-microsoft-com:office:powerpoint" xmlns:com="http://schemas.openxmlformats.org/drawingml/2006/compatibility" xmlns:p14="http://schemas.microsoft.com/office/powerpoint/2010/main" xmlns:p15="http://schemas.microsoft.com/office/powerpoint/2012/main" xmlns:ahyp="http://schemas.microsoft.com/office/drawing/2018/hyperlinkcolor" showMasterPhAnim="0" showMasterSp="0">
+  <p:cSld>
+    <p:spTree>
+      <p:nvGrpSpPr>
+        <p:cNvPr id="183" name="Shape 183"/>
+        <p:cNvGrpSpPr/>
+        <p:nvPr/>
+      </p:nvGrpSpPr>
+      <p:grpSpPr>
+        <a:xfrm>
+          <a:off x="0" y="0"/>
+          <a:ext cx="0" cy="0"/>
+          <a:chOff x="0" y="0"/>
+          <a:chExt cx="0" cy="0"/>
+        </a:xfrm>
+      </p:grpSpPr>
+      <p:sp>
+        <p:nvSpPr>
+          <p:cNvPr id="184" name="Google Shape;184;g3c083afffce_0_0:notes"/>
+          <p:cNvSpPr/>
+          <p:nvPr>
+            <p:ph idx="2" type="sldImg"/>
+          </p:nvPr>
+        </p:nvSpPr>
+        <p:spPr>
+          <a:xfrm>
+            <a:off x="381300" y="685800"/>
+            <a:ext cx="6096000" cy="3429000"/>
+          </a:xfrm>
+          <a:custGeom>
+            <a:rect b="b" l="l" r="r" t="t"/>
+            <a:pathLst>
+              <a:path extrusionOk="0" h="120000" w="120000">
+                <a:moveTo>
+                  <a:pt x="0" y="0"/>
+                </a:moveTo>
+                <a:lnTo>
+                  <a:pt x="120000" y="0"/>
+                </a:lnTo>
+                <a:lnTo>
+                  <a:pt x="120000" y="120000"/>
+                </a:lnTo>
+                <a:lnTo>
+                  <a:pt x="0" y="120000"/>
+                </a:lnTo>
+                <a:close/>
+              </a:path>
+            </a:pathLst>
+          </a:custGeom>
+        </p:spPr>
+      </p:sp>
+      <p:sp>
+        <p:nvSpPr>
+          <p:cNvPr id="185" name="Google Shape;185;g3c083afffce_0_0:notes"/>
           <p:cNvSpPr txBox="1"/>
           <p:nvPr>
             <p:ph idx="1" type="body"/>
@@ -8255,7 +8355,7 @@
         </p:nvSpPr>
         <p:spPr>
           <a:xfrm>
-            <a:off x="265500" y="1382350"/>
+            <a:off x="265500" y="1063450"/>
             <a:ext cx="4045200" cy="1333200"/>
           </a:xfrm>
           <a:prstGeom prst="rect">
@@ -8295,7 +8395,7 @@
         </p:nvSpPr>
         <p:spPr>
           <a:xfrm>
-            <a:off x="265500" y="2769001"/>
+            <a:off x="265500" y="2326676"/>
             <a:ext cx="4045200" cy="1345500"/>
           </a:xfrm>
           <a:prstGeom prst="rect">
@@ -8485,10 +8585,18 @@
               <a:buNone/>
             </a:pPr>
             <a:r>
-              <a:rPr lang="en"/>
+              <a:rPr lang="en">
+                <a:solidFill>
+                  <a:schemeClr val="lt2"/>
+                </a:solidFill>
+              </a:rPr>
               <a:t>VaR vs Monte Carlo</a:t>
             </a:r>
-            <a:endParaRPr/>
+            <a:endParaRPr>
+              <a:solidFill>
+                <a:schemeClr val="lt2"/>
+              </a:solidFill>
+            </a:endParaRPr>
           </a:p>
         </p:txBody>
       </p:sp>
@@ -8934,10 +9042,18 @@
               <a:buNone/>
             </a:pPr>
             <a:r>
-              <a:rPr lang="en"/>
+              <a:rPr lang="en">
+                <a:solidFill>
+                  <a:schemeClr val="lt2"/>
+                </a:solidFill>
+              </a:rPr>
               <a:t>VaR vs Monte Carlo </a:t>
             </a:r>
-            <a:endParaRPr/>
+            <a:endParaRPr>
+              <a:solidFill>
+                <a:schemeClr val="lt2"/>
+              </a:solidFill>
+            </a:endParaRPr>
           </a:p>
         </p:txBody>
       </p:sp>
@@ -10953,10 +11069,18 @@
               <a:buNone/>
             </a:pPr>
             <a:r>
-              <a:rPr lang="en"/>
+              <a:rPr lang="en">
+                <a:solidFill>
+                  <a:schemeClr val="lt2"/>
+                </a:solidFill>
+              </a:rPr>
               <a:t>Unified Quantitative + Computational Framework</a:t>
             </a:r>
-            <a:endParaRPr/>
+            <a:endParaRPr>
+              <a:solidFill>
+                <a:schemeClr val="lt2"/>
+              </a:solidFill>
+            </a:endParaRPr>
           </a:p>
           <a:p>
             <a:pPr indent="0" lvl="0" marL="0" rtl="0" algn="l">
@@ -11045,7 +11169,7 @@
             <a:tbl>
               <a:tblPr>
                 <a:noFill/>
-                <a:tableStyleId>{B7894E53-EFAE-48AB-BE94-D966DF648D7A}</a:tableStyleId>
+                <a:tableStyleId>{218E43A0-3F98-4DC6-990C-72EA836F11A8}</a:tableStyleId>
               </a:tblPr>
               <a:tblGrid>
                 <a:gridCol w="3619500"/>
@@ -11699,10 +11823,18 @@
               <a:buNone/>
             </a:pPr>
             <a:r>
-              <a:rPr lang="en"/>
+              <a:rPr lang="en">
+                <a:solidFill>
+                  <a:schemeClr val="lt2"/>
+                </a:solidFill>
+              </a:rPr>
               <a:t>Vision Behind</a:t>
             </a:r>
-            <a:endParaRPr/>
+            <a:endParaRPr>
+              <a:solidFill>
+                <a:schemeClr val="lt2"/>
+              </a:solidFill>
+            </a:endParaRPr>
           </a:p>
         </p:txBody>
       </p:sp>
@@ -11854,6 +11986,329 @@
           </a:p>
         </p:txBody>
       </p:sp>
+    </p:spTree>
+  </p:cSld>
+  <p:clrMapOvr>
+    <a:masterClrMapping/>
+  </p:clrMapOvr>
+</p:sld>
+</file>
+
+<file path=ppt/slides/slide21.xml><?xml version="1.0" encoding="utf-8"?>
+<p:sld xmlns:a="http://schemas.openxmlformats.org/drawingml/2006/main" xmlns:r="http://schemas.openxmlformats.org/officeDocument/2006/relationships" xmlns:mc="http://schemas.openxmlformats.org/markup-compatibility/2006" xmlns:mv="urn:schemas-microsoft-com:mac:vml" xmlns:p="http://schemas.openxmlformats.org/presentationml/2006/main" xmlns:c="http://schemas.openxmlformats.org/drawingml/2006/chart" xmlns:dgm="http://schemas.openxmlformats.org/drawingml/2006/diagram" xmlns:o="urn:schemas-microsoft-com:office:office" xmlns:v="urn:schemas-microsoft-com:vml" xmlns:pvml="urn:schemas-microsoft-com:office:powerpoint" xmlns:com="http://schemas.openxmlformats.org/drawingml/2006/compatibility" xmlns:p14="http://schemas.microsoft.com/office/powerpoint/2010/main" xmlns:p15="http://schemas.microsoft.com/office/powerpoint/2012/main" xmlns:ahyp="http://schemas.microsoft.com/office/drawing/2018/hyperlinkcolor">
+  <p:cSld>
+    <p:spTree>
+      <p:nvGrpSpPr>
+        <p:cNvPr id="186" name="Shape 186"/>
+        <p:cNvGrpSpPr/>
+        <p:nvPr/>
+      </p:nvGrpSpPr>
+      <p:grpSpPr>
+        <a:xfrm>
+          <a:off x="0" y="0"/>
+          <a:ext cx="0" cy="0"/>
+          <a:chOff x="0" y="0"/>
+          <a:chExt cx="0" cy="0"/>
+        </a:xfrm>
+      </p:grpSpPr>
+      <p:sp>
+        <p:nvSpPr>
+          <p:cNvPr id="187" name="Google Shape;187;p33"/>
+          <p:cNvSpPr txBox="1"/>
+          <p:nvPr>
+            <p:ph type="title"/>
+          </p:nvPr>
+        </p:nvSpPr>
+        <p:spPr>
+          <a:xfrm>
+            <a:off x="311700" y="555600"/>
+            <a:ext cx="5080500" cy="755700"/>
+          </a:xfrm>
+          <a:prstGeom prst="rect">
+            <a:avLst/>
+          </a:prstGeom>
+        </p:spPr>
+        <p:txBody>
+          <a:bodyPr anchorCtr="0" anchor="b" bIns="91425" lIns="91425" spcFirstLastPara="1" rIns="91425" wrap="square" tIns="91425">
+            <a:noAutofit/>
+          </a:bodyPr>
+          <a:lstStyle/>
+          <a:p>
+            <a:pPr indent="0" lvl="0" marL="0" rtl="0" algn="l">
+              <a:spcBef>
+                <a:spcPts val="0"/>
+              </a:spcBef>
+              <a:spcAft>
+                <a:spcPts val="0"/>
+              </a:spcAft>
+              <a:buNone/>
+            </a:pPr>
+            <a:r>
+              <a:rPr lang="en">
+                <a:solidFill>
+                  <a:schemeClr val="lt2"/>
+                </a:solidFill>
+              </a:rPr>
+              <a:t>Documentation</a:t>
+            </a:r>
+            <a:endParaRPr>
+              <a:solidFill>
+                <a:schemeClr val="lt2"/>
+              </a:solidFill>
+            </a:endParaRPr>
+          </a:p>
+        </p:txBody>
+      </p:sp>
+      <p:sp>
+        <p:nvSpPr>
+          <p:cNvPr id="188" name="Google Shape;188;p33"/>
+          <p:cNvSpPr txBox="1"/>
+          <p:nvPr>
+            <p:ph idx="1" type="body"/>
+          </p:nvPr>
+        </p:nvSpPr>
+        <p:spPr>
+          <a:xfrm>
+            <a:off x="311700" y="1389600"/>
+            <a:ext cx="4957200" cy="3179400"/>
+          </a:xfrm>
+          <a:prstGeom prst="rect">
+            <a:avLst/>
+          </a:prstGeom>
+        </p:spPr>
+        <p:txBody>
+          <a:bodyPr anchorCtr="0" anchor="t" bIns="91425" lIns="91425" spcFirstLastPara="1" rIns="91425" wrap="square" tIns="91425">
+            <a:noAutofit/>
+          </a:bodyPr>
+          <a:lstStyle/>
+          <a:p>
+            <a:pPr indent="0" lvl="0" marL="0" rtl="0" algn="l">
+              <a:spcBef>
+                <a:spcPts val="1200"/>
+              </a:spcBef>
+              <a:spcAft>
+                <a:spcPts val="0"/>
+              </a:spcAft>
+              <a:buClr>
+                <a:schemeClr val="dk1"/>
+              </a:buClr>
+              <a:buSzPts val="1100"/>
+              <a:buFont typeface="Arial"/>
+              <a:buNone/>
+            </a:pPr>
+            <a:r>
+              <a:rPr lang="en" sz="1100"/>
+              <a:t>Rivar is being developed as an open-source project. </a:t>
+            </a:r>
+            <a:r>
+              <a:rPr lang="en" sz="1100" u="sng">
+                <a:solidFill>
+                  <a:schemeClr val="hlink"/>
+                </a:solidFill>
+                <a:hlinkClick r:id="rId3"/>
+              </a:rPr>
+              <a:t>View</a:t>
+            </a:r>
+            <a:endParaRPr sz="1100"/>
+          </a:p>
+          <a:p>
+            <a:pPr indent="0" lvl="0" marL="0" rtl="0" algn="l">
+              <a:spcBef>
+                <a:spcPts val="1200"/>
+              </a:spcBef>
+              <a:spcAft>
+                <a:spcPts val="0"/>
+              </a:spcAft>
+              <a:buClr>
+                <a:schemeClr val="dk1"/>
+              </a:buClr>
+              <a:buSzPts val="1100"/>
+              <a:buFont typeface="Arial"/>
+              <a:buNone/>
+            </a:pPr>
+            <a:r>
+              <a:rPr lang="en" sz="1100"/>
+              <a:t>The intention is to make the framework transparent, reviewable, and open to academic and community contributions. As the project evolves, documentation, examples, and implementation details will be publicly available.</a:t>
+            </a:r>
+            <a:endParaRPr sz="1100"/>
+          </a:p>
+          <a:p>
+            <a:pPr indent="0" lvl="0" marL="0" rtl="0" algn="l">
+              <a:spcBef>
+                <a:spcPts val="1200"/>
+              </a:spcBef>
+              <a:spcAft>
+                <a:spcPts val="0"/>
+              </a:spcAft>
+              <a:buClr>
+                <a:schemeClr val="dk1"/>
+              </a:buClr>
+              <a:buSzPts val="1100"/>
+              <a:buFont typeface="Arial"/>
+              <a:buNone/>
+            </a:pPr>
+            <a:r>
+              <a:rPr lang="en" sz="1100"/>
+              <a:t>You are welcome to:</a:t>
+            </a:r>
+            <a:endParaRPr sz="1100"/>
+          </a:p>
+          <a:p>
+            <a:pPr indent="-298450" lvl="0" marL="457200" rtl="0" algn="l">
+              <a:spcBef>
+                <a:spcPts val="1200"/>
+              </a:spcBef>
+              <a:spcAft>
+                <a:spcPts val="0"/>
+              </a:spcAft>
+              <a:buSzPts val="1100"/>
+              <a:buFont typeface="Arial"/>
+              <a:buChar char="●"/>
+            </a:pPr>
+            <a:r>
+              <a:rPr lang="en" sz="1100"/>
+              <a:t>Review the documentation</a:t>
+            </a:r>
+            <a:endParaRPr sz="1100"/>
+          </a:p>
+          <a:p>
+            <a:pPr indent="-298450" lvl="0" marL="457200" rtl="0" algn="l">
+              <a:spcBef>
+                <a:spcPts val="0"/>
+              </a:spcBef>
+              <a:spcAft>
+                <a:spcPts val="0"/>
+              </a:spcAft>
+              <a:buSzPts val="1100"/>
+              <a:buFont typeface="Arial"/>
+              <a:buChar char="●"/>
+            </a:pPr>
+            <a:r>
+              <a:rPr lang="en" sz="1100"/>
+              <a:t>Explore the source code</a:t>
+            </a:r>
+            <a:endParaRPr sz="1100"/>
+          </a:p>
+          <a:p>
+            <a:pPr indent="-298450" lvl="0" marL="457200" rtl="0" algn="l">
+              <a:spcBef>
+                <a:spcPts val="0"/>
+              </a:spcBef>
+              <a:spcAft>
+                <a:spcPts val="0"/>
+              </a:spcAft>
+              <a:buSzPts val="1100"/>
+              <a:buFont typeface="Arial"/>
+              <a:buChar char="●"/>
+            </a:pPr>
+            <a:r>
+              <a:rPr lang="en" sz="1100"/>
+              <a:t>Suggest improvements</a:t>
+            </a:r>
+            <a:endParaRPr sz="1100"/>
+          </a:p>
+          <a:p>
+            <a:pPr indent="-298450" lvl="0" marL="457200" rtl="0" algn="l">
+              <a:spcBef>
+                <a:spcPts val="0"/>
+              </a:spcBef>
+              <a:spcAft>
+                <a:spcPts val="0"/>
+              </a:spcAft>
+              <a:buSzPts val="1100"/>
+              <a:buFont typeface="Arial"/>
+              <a:buChar char="●"/>
+            </a:pPr>
+            <a:r>
+              <a:rPr lang="en" sz="1100"/>
+              <a:t>Contribute ideas or extensions</a:t>
+            </a:r>
+            <a:endParaRPr sz="1100"/>
+          </a:p>
+          <a:p>
+            <a:pPr indent="-298450" lvl="0" marL="457200" rtl="0" algn="l">
+              <a:spcBef>
+                <a:spcPts val="0"/>
+              </a:spcBef>
+              <a:spcAft>
+                <a:spcPts val="0"/>
+              </a:spcAft>
+              <a:buSzPts val="1100"/>
+              <a:buFont typeface="Arial"/>
+              <a:buChar char="●"/>
+            </a:pPr>
+            <a:r>
+              <a:rPr lang="en" sz="1100"/>
+              <a:t>Use it for research or experimentation</a:t>
+            </a:r>
+            <a:endParaRPr sz="1100"/>
+          </a:p>
+          <a:p>
+            <a:pPr indent="0" lvl="0" marL="0" rtl="0" algn="l">
+              <a:spcBef>
+                <a:spcPts val="1200"/>
+              </a:spcBef>
+              <a:spcAft>
+                <a:spcPts val="0"/>
+              </a:spcAft>
+              <a:buClr>
+                <a:schemeClr val="dk1"/>
+              </a:buClr>
+              <a:buSzPts val="1100"/>
+              <a:buFont typeface="Arial"/>
+              <a:buNone/>
+            </a:pPr>
+            <a:r>
+              <a:rPr lang="en" sz="1100"/>
+              <a:t>Feedback, discussion, and collaboration are encouraged.</a:t>
+            </a:r>
+            <a:endParaRPr sz="1100"/>
+          </a:p>
+          <a:p>
+            <a:pPr indent="0" lvl="0" marL="0" rtl="0" algn="l">
+              <a:spcBef>
+                <a:spcPts val="1200"/>
+              </a:spcBef>
+              <a:spcAft>
+                <a:spcPts val="1600"/>
+              </a:spcAft>
+              <a:buNone/>
+            </a:pPr>
+            <a:r>
+              <a:t/>
+            </a:r>
+            <a:endParaRPr sz="1100"/>
+          </a:p>
+        </p:txBody>
+      </p:sp>
+      <p:pic>
+        <p:nvPicPr>
+          <p:cNvPr id="189" name="Google Shape;189;p33" title="Untitled design (1).png"/>
+          <p:cNvPicPr preferRelativeResize="0"/>
+          <p:nvPr/>
+        </p:nvPicPr>
+        <p:blipFill>
+          <a:blip r:embed="rId4">
+            <a:alphaModFix/>
+          </a:blip>
+          <a:stretch>
+            <a:fillRect/>
+          </a:stretch>
+        </p:blipFill>
+        <p:spPr>
+          <a:xfrm>
+            <a:off x="5596950" y="152400"/>
+            <a:ext cx="3421114" cy="4838702"/>
+          </a:xfrm>
+          <a:prstGeom prst="rect">
+            <a:avLst/>
+          </a:prstGeom>
+          <a:noFill/>
+          <a:ln>
+            <a:noFill/>
+          </a:ln>
+        </p:spPr>
+      </p:pic>
     </p:spTree>
   </p:cSld>
   <p:clrMapOvr>
@@ -12929,6 +13384,285 @@
 </file>
 
 <file path=ppt/theme/theme1.xml><?xml version="1.0" encoding="utf-8"?>
+<a:theme xmlns:a="http://schemas.openxmlformats.org/drawingml/2006/main" xmlns:r="http://schemas.openxmlformats.org/officeDocument/2006/relationships">
+  <a:themeElements>
+    <a:clrScheme name="Default">
+      <a:dk1>
+        <a:srgbClr val="000000"/>
+      </a:dk1>
+      <a:lt1>
+        <a:srgbClr val="FFFFFF"/>
+      </a:lt1>
+      <a:dk2>
+        <a:srgbClr val="158158"/>
+      </a:dk2>
+      <a:lt2>
+        <a:srgbClr val="F3F3F3"/>
+      </a:lt2>
+      <a:accent1>
+        <a:srgbClr val="058DC7"/>
+      </a:accent1>
+      <a:accent2>
+        <a:srgbClr val="50B432"/>
+      </a:accent2>
+      <a:accent3>
+        <a:srgbClr val="ED561B"/>
+      </a:accent3>
+      <a:accent4>
+        <a:srgbClr val="EDEF00"/>
+      </a:accent4>
+      <a:accent5>
+        <a:srgbClr val="24CBE5"/>
+      </a:accent5>
+      <a:accent6>
+        <a:srgbClr val="64E572"/>
+      </a:accent6>
+      <a:hlink>
+        <a:srgbClr val="2200CC"/>
+      </a:hlink>
+      <a:folHlink>
+        <a:srgbClr val="551A8B"/>
+      </a:folHlink>
+    </a:clrScheme>
+    <a:fontScheme name="Office">
+      <a:majorFont>
+        <a:latin typeface="Arial"/>
+        <a:ea typeface=""/>
+        <a:cs typeface=""/>
+        <a:font script="Jpan" typeface="ＭＳ Ｐゴシック"/>
+        <a:font script="Hang" typeface="맑은 고딕"/>
+        <a:font script="Hans" typeface="宋体"/>
+        <a:font script="Hant" typeface="新細明體"/>
+        <a:font script="Arab" typeface="Times New Roman"/>
+        <a:font script="Hebr" typeface="Times New Roman"/>
+        <a:font script="Thai" typeface="Angsana New"/>
+        <a:font script="Ethi" typeface="Nyala"/>
+        <a:font script="Beng" typeface="Vrinda"/>
+        <a:font script="Gujr" typeface="Shruti"/>
+        <a:font script="Khmr" typeface="MoolBoran"/>
+        <a:font script="Knda" typeface="Tunga"/>
+        <a:font script="Guru" typeface="Raavi"/>
+        <a:font script="Cans" typeface="Euphemia"/>
+        <a:font script="Cher" typeface="Plantagenet Cherokee"/>
+        <a:font script="Yiii" typeface="Microsoft Yi Baiti"/>
+        <a:font script="Tibt" typeface="Microsoft Himalaya"/>
+        <a:font script="Thaa" typeface="MV Boli"/>
+        <a:font script="Deva" typeface="Mangal"/>
+        <a:font script="Telu" typeface="Gautami"/>
+        <a:font script="Taml" typeface="Latha"/>
+        <a:font script="Syrc" typeface="Estrangelo Edessa"/>
+        <a:font script="Orya" typeface="Kalinga"/>
+        <a:font script="Mlym" typeface="Kartika"/>
+        <a:font script="Laoo" typeface="DokChampa"/>
+        <a:font script="Sinh" typeface="Iskoola Pota"/>
+        <a:font script="Mong" typeface="Mongolian Baiti"/>
+        <a:font script="Viet" typeface="Times New Roman"/>
+        <a:font script="Uigh" typeface="Microsoft Uighur"/>
+        <a:font script="Geor" typeface="Sylfaen"/>
+      </a:majorFont>
+      <a:minorFont>
+        <a:latin typeface="Arial"/>
+        <a:ea typeface=""/>
+        <a:cs typeface=""/>
+        <a:font script="Jpan" typeface="ＭＳ Ｐゴシック"/>
+        <a:font script="Hang" typeface="맑은 고딕"/>
+        <a:font script="Hans" typeface="宋体"/>
+        <a:font script="Hant" typeface="新細明體"/>
+        <a:font script="Arab" typeface="Arial"/>
+        <a:font script="Hebr" typeface="Arial"/>
+        <a:font script="Thai" typeface="Cordia New"/>
+        <a:font script="Ethi" typeface="Nyala"/>
+        <a:font script="Beng" typeface="Vrinda"/>
+        <a:font script="Gujr" typeface="Shruti"/>
+        <a:font script="Khmr" typeface="DaunPenh"/>
+        <a:font script="Knda" typeface="Tunga"/>
+        <a:font script="Guru" typeface="Raavi"/>
+        <a:font script="Cans" typeface="Euphemia"/>
+        <a:font script="Cher" typeface="Plantagenet Cherokee"/>
+        <a:font script="Yiii" typeface="Microsoft Yi Baiti"/>
+        <a:font script="Tibt" typeface="Microsoft Himalaya"/>
+        <a:font script="Thaa" typeface="MV Boli"/>
+        <a:font script="Deva" typeface="Mangal"/>
+        <a:font script="Telu" typeface="Gautami"/>
+        <a:font script="Taml" typeface="Latha"/>
+        <a:font script="Syrc" typeface="Estrangelo Edessa"/>
+        <a:font script="Orya" typeface="Kalinga"/>
+        <a:font script="Mlym" typeface="Kartika"/>
+        <a:font script="Laoo" typeface="DokChampa"/>
+        <a:font script="Sinh" typeface="Iskoola Pota"/>
+        <a:font script="Mong" typeface="Mongolian Baiti"/>
+        <a:font script="Viet" typeface="Arial"/>
+        <a:font script="Uigh" typeface="Microsoft Uighur"/>
+        <a:font script="Geor" typeface="Sylfaen"/>
+      </a:minorFont>
+    </a:fontScheme>
+    <a:fmtScheme name="Office">
+      <a:fillStyleLst>
+        <a:solidFill>
+          <a:schemeClr val="phClr"/>
+        </a:solidFill>
+        <a:gradFill rotWithShape="1">
+          <a:gsLst>
+            <a:gs pos="0">
+              <a:schemeClr val="phClr">
+                <a:tint val="50000"/>
+                <a:satMod val="300000"/>
+              </a:schemeClr>
+            </a:gs>
+            <a:gs pos="35000">
+              <a:schemeClr val="phClr">
+                <a:tint val="37000"/>
+                <a:satMod val="300000"/>
+              </a:schemeClr>
+            </a:gs>
+            <a:gs pos="100000">
+              <a:schemeClr val="phClr">
+                <a:tint val="15000"/>
+                <a:satMod val="350000"/>
+              </a:schemeClr>
+            </a:gs>
+          </a:gsLst>
+          <a:lin ang="16200000" scaled="1"/>
+        </a:gradFill>
+        <a:gradFill rotWithShape="1">
+          <a:gsLst>
+            <a:gs pos="0">
+              <a:schemeClr val="phClr">
+                <a:tint val="100000"/>
+                <a:shade val="100000"/>
+                <a:satMod val="130000"/>
+              </a:schemeClr>
+            </a:gs>
+            <a:gs pos="100000">
+              <a:schemeClr val="phClr">
+                <a:tint val="50000"/>
+                <a:shade val="100000"/>
+                <a:satMod val="350000"/>
+              </a:schemeClr>
+            </a:gs>
+          </a:gsLst>
+          <a:lin ang="16200000" scaled="0"/>
+        </a:gradFill>
+      </a:fillStyleLst>
+      <a:lnStyleLst>
+        <a:ln w="9525" cap="flat" cmpd="sng" algn="ctr">
+          <a:solidFill>
+            <a:schemeClr val="phClr">
+              <a:shade val="95000"/>
+              <a:satMod val="105000"/>
+            </a:schemeClr>
+          </a:solidFill>
+          <a:prstDash val="solid"/>
+        </a:ln>
+        <a:ln w="25400" cap="flat" cmpd="sng" algn="ctr">
+          <a:solidFill>
+            <a:schemeClr val="phClr"/>
+          </a:solidFill>
+          <a:prstDash val="solid"/>
+        </a:ln>
+        <a:ln w="38100" cap="flat" cmpd="sng" algn="ctr">
+          <a:solidFill>
+            <a:schemeClr val="phClr"/>
+          </a:solidFill>
+          <a:prstDash val="solid"/>
+        </a:ln>
+      </a:lnStyleLst>
+      <a:effectStyleLst>
+        <a:effectStyle>
+          <a:effectLst>
+            <a:outerShdw blurRad="40000" dist="20000" dir="5400000" rotWithShape="0">
+              <a:srgbClr val="000000">
+                <a:alpha val="38000"/>
+              </a:srgbClr>
+            </a:outerShdw>
+          </a:effectLst>
+        </a:effectStyle>
+        <a:effectStyle>
+          <a:effectLst>
+            <a:outerShdw blurRad="40000" dist="23000" dir="5400000" rotWithShape="0">
+              <a:srgbClr val="000000">
+                <a:alpha val="35000"/>
+              </a:srgbClr>
+            </a:outerShdw>
+          </a:effectLst>
+        </a:effectStyle>
+        <a:effectStyle>
+          <a:effectLst>
+            <a:outerShdw blurRad="40000" dist="23000" dir="5400000" rotWithShape="0">
+              <a:srgbClr val="000000">
+                <a:alpha val="35000"/>
+              </a:srgbClr>
+            </a:outerShdw>
+          </a:effectLst>
+          <a:scene3d>
+            <a:camera prst="orthographicFront">
+              <a:rot lat="0" lon="0" rev="0"/>
+            </a:camera>
+            <a:lightRig rig="threePt" dir="t">
+              <a:rot lat="0" lon="0" rev="1200000"/>
+            </a:lightRig>
+          </a:scene3d>
+          <a:sp3d>
+            <a:bevelT w="63500" h="25400"/>
+          </a:sp3d>
+        </a:effectStyle>
+      </a:effectStyleLst>
+      <a:bgFillStyleLst>
+        <a:solidFill>
+          <a:schemeClr val="phClr"/>
+        </a:solidFill>
+        <a:gradFill rotWithShape="1">
+          <a:gsLst>
+            <a:gs pos="0">
+              <a:schemeClr val="phClr">
+                <a:tint val="40000"/>
+                <a:satMod val="350000"/>
+              </a:schemeClr>
+            </a:gs>
+            <a:gs pos="40000">
+              <a:schemeClr val="phClr">
+                <a:tint val="45000"/>
+                <a:shade val="99000"/>
+                <a:satMod val="350000"/>
+              </a:schemeClr>
+            </a:gs>
+            <a:gs pos="100000">
+              <a:schemeClr val="phClr">
+                <a:shade val="20000"/>
+                <a:satMod val="255000"/>
+              </a:schemeClr>
+            </a:gs>
+          </a:gsLst>
+          <a:path path="circle">
+            <a:fillToRect l="50000" t="-80000" r="50000" b="180000"/>
+          </a:path>
+        </a:gradFill>
+        <a:gradFill rotWithShape="1">
+          <a:gsLst>
+            <a:gs pos="0">
+              <a:schemeClr val="phClr">
+                <a:tint val="80000"/>
+                <a:satMod val="300000"/>
+              </a:schemeClr>
+            </a:gs>
+            <a:gs pos="100000">
+              <a:schemeClr val="phClr">
+                <a:shade val="30000"/>
+                <a:satMod val="200000"/>
+              </a:schemeClr>
+            </a:gs>
+          </a:gsLst>
+          <a:path path="circle">
+            <a:fillToRect l="50000" t="50000" r="50000" b="50000"/>
+          </a:path>
+        </a:gradFill>
+      </a:bgFillStyleLst>
+    </a:fmtScheme>
+  </a:themeElements>
+</a:theme>
+</file>
+
+<file path=ppt/theme/theme2.xml><?xml version="1.0" encoding="utf-8"?>
 <a:theme xmlns:a="http://schemas.openxmlformats.org/drawingml/2006/main" xmlns:r="http://schemas.openxmlformats.org/officeDocument/2006/relationships" name="Paperback">
   <a:themeElements>
     <a:clrScheme name="Paperback">
@@ -13205,283 +13939,4 @@
     </a:fmtScheme>
   </a:themeElements>
 </a:theme>
-</file>
-
-<file path=ppt/theme/theme2.xml><?xml version="1.0" encoding="utf-8"?>
-<a:theme xmlns:a="http://schemas.openxmlformats.org/drawingml/2006/main" xmlns:r="http://schemas.openxmlformats.org/officeDocument/2006/relationships">
-  <a:themeElements>
-    <a:clrScheme name="Default">
-      <a:dk1>
-        <a:srgbClr val="000000"/>
-      </a:dk1>
-      <a:lt1>
-        <a:srgbClr val="FFFFFF"/>
-      </a:lt1>
-      <a:dk2>
-        <a:srgbClr val="158158"/>
-      </a:dk2>
-      <a:lt2>
-        <a:srgbClr val="F3F3F3"/>
-      </a:lt2>
-      <a:accent1>
-        <a:srgbClr val="058DC7"/>
-      </a:accent1>
-      <a:accent2>
-        <a:srgbClr val="50B432"/>
-      </a:accent2>
-      <a:accent3>
-        <a:srgbClr val="ED561B"/>
-      </a:accent3>
-      <a:accent4>
-        <a:srgbClr val="EDEF00"/>
-      </a:accent4>
-      <a:accent5>
-        <a:srgbClr val="24CBE5"/>
-      </a:accent5>
-      <a:accent6>
-        <a:srgbClr val="64E572"/>
-      </a:accent6>
-      <a:hlink>
-        <a:srgbClr val="2200CC"/>
-      </a:hlink>
-      <a:folHlink>
-        <a:srgbClr val="551A8B"/>
-      </a:folHlink>
-    </a:clrScheme>
-    <a:fontScheme name="Office">
-      <a:majorFont>
-        <a:latin typeface="Arial"/>
-        <a:ea typeface=""/>
-        <a:cs typeface=""/>
-        <a:font script="Jpan" typeface="ＭＳ Ｐゴシック"/>
-        <a:font script="Hang" typeface="맑은 고딕"/>
-        <a:font script="Hans" typeface="宋体"/>
-        <a:font script="Hant" typeface="新細明體"/>
-        <a:font script="Arab" typeface="Times New Roman"/>
-        <a:font script="Hebr" typeface="Times New Roman"/>
-        <a:font script="Thai" typeface="Angsana New"/>
-        <a:font script="Ethi" typeface="Nyala"/>
-        <a:font script="Beng" typeface="Vrinda"/>
-        <a:font script="Gujr" typeface="Shruti"/>
-        <a:font script="Khmr" typeface="MoolBoran"/>
-        <a:font script="Knda" typeface="Tunga"/>
-        <a:font script="Guru" typeface="Raavi"/>
-        <a:font script="Cans" typeface="Euphemia"/>
-        <a:font script="Cher" typeface="Plantagenet Cherokee"/>
-        <a:font script="Yiii" typeface="Microsoft Yi Baiti"/>
-        <a:font script="Tibt" typeface="Microsoft Himalaya"/>
-        <a:font script="Thaa" typeface="MV Boli"/>
-        <a:font script="Deva" typeface="Mangal"/>
-        <a:font script="Telu" typeface="Gautami"/>
-        <a:font script="Taml" typeface="Latha"/>
-        <a:font script="Syrc" typeface="Estrangelo Edessa"/>
-        <a:font script="Orya" typeface="Kalinga"/>
-        <a:font script="Mlym" typeface="Kartika"/>
-        <a:font script="Laoo" typeface="DokChampa"/>
-        <a:font script="Sinh" typeface="Iskoola Pota"/>
-        <a:font script="Mong" typeface="Mongolian Baiti"/>
-        <a:font script="Viet" typeface="Times New Roman"/>
-        <a:font script="Uigh" typeface="Microsoft Uighur"/>
-        <a:font script="Geor" typeface="Sylfaen"/>
-      </a:majorFont>
-      <a:minorFont>
-        <a:latin typeface="Arial"/>
-        <a:ea typeface=""/>
-        <a:cs typeface=""/>
-        <a:font script="Jpan" typeface="ＭＳ Ｐゴシック"/>
-        <a:font script="Hang" typeface="맑은 고딕"/>
-        <a:font script="Hans" typeface="宋体"/>
-        <a:font script="Hant" typeface="新細明體"/>
-        <a:font script="Arab" typeface="Arial"/>
-        <a:font script="Hebr" typeface="Arial"/>
-        <a:font script="Thai" typeface="Cordia New"/>
-        <a:font script="Ethi" typeface="Nyala"/>
-        <a:font script="Beng" typeface="Vrinda"/>
-        <a:font script="Gujr" typeface="Shruti"/>
-        <a:font script="Khmr" typeface="DaunPenh"/>
-        <a:font script="Knda" typeface="Tunga"/>
-        <a:font script="Guru" typeface="Raavi"/>
-        <a:font script="Cans" typeface="Euphemia"/>
-        <a:font script="Cher" typeface="Plantagenet Cherokee"/>
-        <a:font script="Yiii" typeface="Microsoft Yi Baiti"/>
-        <a:font script="Tibt" typeface="Microsoft Himalaya"/>
-        <a:font script="Thaa" typeface="MV Boli"/>
-        <a:font script="Deva" typeface="Mangal"/>
-        <a:font script="Telu" typeface="Gautami"/>
-        <a:font script="Taml" typeface="Latha"/>
-        <a:font script="Syrc" typeface="Estrangelo Edessa"/>
-        <a:font script="Orya" typeface="Kalinga"/>
-        <a:font script="Mlym" typeface="Kartika"/>
-        <a:font script="Laoo" typeface="DokChampa"/>
-        <a:font script="Sinh" typeface="Iskoola Pota"/>
-        <a:font script="Mong" typeface="Mongolian Baiti"/>
-        <a:font script="Viet" typeface="Arial"/>
-        <a:font script="Uigh" typeface="Microsoft Uighur"/>
-        <a:font script="Geor" typeface="Sylfaen"/>
-      </a:minorFont>
-    </a:fontScheme>
-    <a:fmtScheme name="Office">
-      <a:fillStyleLst>
-        <a:solidFill>
-          <a:schemeClr val="phClr"/>
-        </a:solidFill>
-        <a:gradFill rotWithShape="1">
-          <a:gsLst>
-            <a:gs pos="0">
-              <a:schemeClr val="phClr">
-                <a:tint val="50000"/>
-                <a:satMod val="300000"/>
-              </a:schemeClr>
-            </a:gs>
-            <a:gs pos="35000">
-              <a:schemeClr val="phClr">
-                <a:tint val="37000"/>
-                <a:satMod val="300000"/>
-              </a:schemeClr>
-            </a:gs>
-            <a:gs pos="100000">
-              <a:schemeClr val="phClr">
-                <a:tint val="15000"/>
-                <a:satMod val="350000"/>
-              </a:schemeClr>
-            </a:gs>
-          </a:gsLst>
-          <a:lin ang="16200000" scaled="1"/>
-        </a:gradFill>
-        <a:gradFill rotWithShape="1">
-          <a:gsLst>
-            <a:gs pos="0">
-              <a:schemeClr val="phClr">
-                <a:tint val="100000"/>
-                <a:shade val="100000"/>
-                <a:satMod val="130000"/>
-              </a:schemeClr>
-            </a:gs>
-            <a:gs pos="100000">
-              <a:schemeClr val="phClr">
-                <a:tint val="50000"/>
-                <a:shade val="100000"/>
-                <a:satMod val="350000"/>
-              </a:schemeClr>
-            </a:gs>
-          </a:gsLst>
-          <a:lin ang="16200000" scaled="0"/>
-        </a:gradFill>
-      </a:fillStyleLst>
-      <a:lnStyleLst>
-        <a:ln w="9525" cap="flat" cmpd="sng" algn="ctr">
-          <a:solidFill>
-            <a:schemeClr val="phClr">
-              <a:shade val="95000"/>
-              <a:satMod val="105000"/>
-            </a:schemeClr>
-          </a:solidFill>
-          <a:prstDash val="solid"/>
-        </a:ln>
-        <a:ln w="25400" cap="flat" cmpd="sng" algn="ctr">
-          <a:solidFill>
-            <a:schemeClr val="phClr"/>
-          </a:solidFill>
-          <a:prstDash val="solid"/>
-        </a:ln>
-        <a:ln w="38100" cap="flat" cmpd="sng" algn="ctr">
-          <a:solidFill>
-            <a:schemeClr val="phClr"/>
-          </a:solidFill>
-          <a:prstDash val="solid"/>
-        </a:ln>
-      </a:lnStyleLst>
-      <a:effectStyleLst>
-        <a:effectStyle>
-          <a:effectLst>
-            <a:outerShdw blurRad="40000" dist="20000" dir="5400000" rotWithShape="0">
-              <a:srgbClr val="000000">
-                <a:alpha val="38000"/>
-              </a:srgbClr>
-            </a:outerShdw>
-          </a:effectLst>
-        </a:effectStyle>
-        <a:effectStyle>
-          <a:effectLst>
-            <a:outerShdw blurRad="40000" dist="23000" dir="5400000" rotWithShape="0">
-              <a:srgbClr val="000000">
-                <a:alpha val="35000"/>
-              </a:srgbClr>
-            </a:outerShdw>
-          </a:effectLst>
-        </a:effectStyle>
-        <a:effectStyle>
-          <a:effectLst>
-            <a:outerShdw blurRad="40000" dist="23000" dir="5400000" rotWithShape="0">
-              <a:srgbClr val="000000">
-                <a:alpha val="35000"/>
-              </a:srgbClr>
-            </a:outerShdw>
-          </a:effectLst>
-          <a:scene3d>
-            <a:camera prst="orthographicFront">
-              <a:rot lat="0" lon="0" rev="0"/>
-            </a:camera>
-            <a:lightRig rig="threePt" dir="t">
-              <a:rot lat="0" lon="0" rev="1200000"/>
-            </a:lightRig>
-          </a:scene3d>
-          <a:sp3d>
-            <a:bevelT w="63500" h="25400"/>
-          </a:sp3d>
-        </a:effectStyle>
-      </a:effectStyleLst>
-      <a:bgFillStyleLst>
-        <a:solidFill>
-          <a:schemeClr val="phClr"/>
-        </a:solidFill>
-        <a:gradFill rotWithShape="1">
-          <a:gsLst>
-            <a:gs pos="0">
-              <a:schemeClr val="phClr">
-                <a:tint val="40000"/>
-                <a:satMod val="350000"/>
-              </a:schemeClr>
-            </a:gs>
-            <a:gs pos="40000">
-              <a:schemeClr val="phClr">
-                <a:tint val="45000"/>
-                <a:shade val="99000"/>
-                <a:satMod val="350000"/>
-              </a:schemeClr>
-            </a:gs>
-            <a:gs pos="100000">
-              <a:schemeClr val="phClr">
-                <a:shade val="20000"/>
-                <a:satMod val="255000"/>
-              </a:schemeClr>
-            </a:gs>
-          </a:gsLst>
-          <a:path path="circle">
-            <a:fillToRect l="50000" t="-80000" r="50000" b="180000"/>
-          </a:path>
-        </a:gradFill>
-        <a:gradFill rotWithShape="1">
-          <a:gsLst>
-            <a:gs pos="0">
-              <a:schemeClr val="phClr">
-                <a:tint val="80000"/>
-                <a:satMod val="300000"/>
-              </a:schemeClr>
-            </a:gs>
-            <a:gs pos="100000">
-              <a:schemeClr val="phClr">
-                <a:shade val="30000"/>
-                <a:satMod val="200000"/>
-              </a:schemeClr>
-            </a:gs>
-          </a:gsLst>
-          <a:path path="circle">
-            <a:fillToRect l="50000" t="50000" r="50000" b="50000"/>
-          </a:path>
-        </a:gradFill>
-      </a:bgFillStyleLst>
-    </a:fmtScheme>
-  </a:themeElements>
-</a:theme>
 </file>
--- a/RiVaR-College.pptx
+++ b/RiVaR-College.pptx
@@ -11169,7 +11169,7 @@
             <a:tbl>
               <a:tblPr>
                 <a:noFill/>
-                <a:tableStyleId>{218E43A0-3F98-4DC6-990C-72EA836F11A8}</a:tableStyleId>
+                <a:tableStyleId>{E7FB5882-A3AA-49AE-AC1E-22BE8AB81C57}</a:tableStyleId>
               </a:tblPr>
               <a:tblGrid>
                 <a:gridCol w="3619500"/>
@@ -11748,20 +11748,20 @@
           </a:bodyPr>
           <a:lstStyle/>
           <a:p>
-            <a:pPr indent="0" lvl="0" marL="0" rtl="0" algn="l">
-              <a:spcBef>
-                <a:spcPts val="0"/>
-              </a:spcBef>
-              <a:spcAft>
-                <a:spcPts val="0"/>
-              </a:spcAft>
-              <a:buNone/>
-            </a:pPr>
-            <a:r>
-              <a:rPr lang="en"/>
-              <a:t>RIVAR</a:t>
-            </a:r>
-            <a:endParaRPr/>
+            <a:pPr indent="0" lvl="0" marL="0" rtl="0" algn="ctr">
+              <a:spcBef>
+                <a:spcPts val="0"/>
+              </a:spcBef>
+              <a:spcAft>
+                <a:spcPts val="0"/>
+              </a:spcAft>
+              <a:buNone/>
+            </a:pPr>
+            <a:r>
+              <a:rPr lang="en" sz="5900"/>
+              <a:t>RiVaR</a:t>
+            </a:r>
+            <a:endParaRPr sz="5900"/>
           </a:p>
         </p:txBody>
       </p:sp>
@@ -12022,7 +12022,7 @@
         <p:spPr>
           <a:xfrm>
             <a:off x="311700" y="555600"/>
-            <a:ext cx="5080500" cy="755700"/>
+            <a:ext cx="2808000" cy="755700"/>
           </a:xfrm>
           <a:prstGeom prst="rect">
             <a:avLst/>
@@ -12070,7 +12070,7 @@
         <p:spPr>
           <a:xfrm>
             <a:off x="311700" y="1389600"/>
-            <a:ext cx="4957200" cy="3179400"/>
+            <a:ext cx="4010700" cy="3179400"/>
           </a:xfrm>
           <a:prstGeom prst="rect">
             <a:avLst/>
@@ -12283,7 +12283,7 @@
       </p:sp>
       <p:pic>
         <p:nvPicPr>
-          <p:cNvPr id="189" name="Google Shape;189;p33" title="Untitled design (1).png"/>
+          <p:cNvPr id="189" name="Google Shape;189;p33" title="Untitled design (2).png"/>
           <p:cNvPicPr preferRelativeResize="0"/>
           <p:nvPr/>
         </p:nvPicPr>
@@ -12297,8 +12297,8 @@
         </p:blipFill>
         <p:spPr>
           <a:xfrm>
-            <a:off x="5596950" y="152400"/>
-            <a:ext cx="3421114" cy="4838702"/>
+            <a:off x="4471375" y="0"/>
+            <a:ext cx="4672626" cy="5143499"/>
           </a:xfrm>
           <a:prstGeom prst="rect">
             <a:avLst/>
@@ -12368,7 +12368,7 @@
             </a:pPr>
             <a:r>
               <a:rPr lang="en" sz="3000"/>
-              <a:t>About Rivar</a:t>
+              <a:t>About RiVaR</a:t>
             </a:r>
             <a:endParaRPr sz="3000"/>
           </a:p>
@@ -12408,7 +12408,7 @@
             </a:pPr>
             <a:r>
               <a:rPr lang="en"/>
-              <a:t>Rivar is a Rust-based quantitative and computational risk management framework designed to model, simulate, and evaluate portfolio risk using mathematically rigorous methods and high-performance numerical computation.</a:t>
+              <a:t>RiVaR is a Rust-based quantitative and computational risk management framework designed to model, simulate, and evaluate portfolio risk using mathematically rigorous methods and high-performance numerical computation.</a:t>
             </a:r>
             <a:endParaRPr/>
           </a:p>
